--- a/assets/powerpoints/module-probleme/A1-un-probleme-dans-mon-logement.pptx
+++ b/assets/powerpoints/module-probleme/A1-un-probleme-dans-mon-logement.pptx
@@ -4791,7 +4791,7 @@
                 </a:solidFill>
                 <a:latin typeface="Verdana"/>
               </a:rPr>
-              <a:t>SÉANCE A1  ·  MODULE 9</a:t>
+              <a:t>SÉANCE A1  ·  MODULE 10</a:t>
             </a:r>
           </a:p>
         </p:txBody>

--- a/assets/powerpoints/module-probleme/A1-un-probleme-dans-mon-logement.pptx
+++ b/assets/powerpoints/module-probleme/A1-un-probleme-dans-mon-logement.pptx
@@ -519,7 +519,7 @@
           <a:lstStyle/>
           <a:p>
             <a:r>
-              <a:t>Ouverture du module 9. Ne pas encore expliquer le vocabulaire : la séance commence par une situation, pas par une liste de mots. Écrire au tableau : 4B, dernier étage, six logements.</a:t>
+              <a:t>Ouverture du module. Ne pas encore expliquer le vocabulaire : la séance commence par une situation, pas par une liste de mots. Écrire au tableau : 4B, dernier étage, six logements.</a:t>
             </a:r>
           </a:p>
         </p:txBody>
